--- a/桥体卫士答辩PPT/桥体卫士答辩PPT.pptx
+++ b/桥体卫士答辩PPT/桥体卫士答辩PPT.pptx
@@ -553,7 +553,7 @@
   <p:cSld>
     <p:spTree>
       <p:nvGrpSpPr>
-        <p:cNvPr id="1" name="" descr="&lt;Slide style={{ background: '#FFFFFF', width: '1280px', height: '720px', padding: '0 40px' }}&gt;&#10;  &lt;Box style={{ flexDirection: 'column', width: '100%', height: '100%' }}&gt;&#10;    &lt;Box style={{ height: 180, background: '#0E3F8C', flexDirection: 'column', justifyContent: 'center', padding: '0 40px' }}&gt;&#10;      &lt;Text style={{ fontSize: 22, color: '#DCE7F5', letterSpacing: 3, fontWeight: 'bold' }}&gt;桥梁结构健康监测 · 缩尺原型&lt;/Text&gt;&#10;      &lt;Text style={{ fontSize: 15, color: '#9DB8DC', marginTop: 10 }}&gt;职业院校技能竞赛 · 软件技术专业 · 4 人团队&lt;/Text&gt;&#10;    &lt;/Box&gt;&#10;    &lt;Box style={{ flex: 1, flexDirection: 'column', justifyContent: 'center', alignItems: 'center' }}&gt;&#10;      &lt;Text style={{ fontSize: 92, fontWeight: 'bold', color: '#0E3F8C', letterSpacing: 8 }}&gt;桥体卫士&lt;/Text&gt;&#10;      &lt;Box style={{ width: 180, height: 4, background: '#1E4FA8', marginTop: 18, borderRadius: 2 }} /&gt;&#10;      &lt;Text style={{ fontSize: 28, color: '#4A5568', marginTop: 22, letterSpacing: 2 }}&gt;Bridge Guardian&lt;/Text&gt;&#10;      &lt;Text style={{ fontSize: 18, color: '#8B97A8', marginTop: 16 }}&gt;采集 · 判断 · 存储 · 展示 · 处置 全闭环监测原型&lt;/Text&gt;&#10;    &lt;/Box&gt;&#10;    &lt;Box style={{ height: 90, flexDirection: 'row', justifyContent: 'space-between', alignItems: 'center', borderTop: '1px solid #E5E7EB' }}&gt;&#10;      &lt;Text style={{ fontSize: 16, color: '#4A5568' }}&gt;答辩时间：2026 年 11 月&lt;/Text&gt;&#10;      &lt;Text style={{ fontSize: 16, color: '#4A5568' }}&gt;汇报人：团队组长&lt;/Text&gt;&#10;    &lt;/Box&gt;&#10;  &lt;/Box&gt;&#10;&lt;/Slide&gt;&#10;"/>
+        <p:cNvPr id="1" name=""/>
         <p:cNvGrpSpPr/>
         <p:nvPr/>
       </p:nvGrpSpPr>
@@ -586,7 +586,10 @@
         </p:spPr>
         <p:txBody>
           <a:bodyPr/>
-          <a:p/>
+          <a:p>
+            <a:pPr/>
+            <a:endParaRPr/>
+          </a:p>
         </p:txBody>
       </p:sp>
       <p:sp>
@@ -610,7 +613,10 @@
         </p:spPr>
         <p:txBody>
           <a:bodyPr/>
-          <a:p/>
+          <a:p>
+            <a:pPr/>
+            <a:endParaRPr/>
+          </a:p>
         </p:txBody>
       </p:sp>
       <p:sp>
@@ -801,7 +807,10 @@
         </p:spPr>
         <p:txBody>
           <a:bodyPr/>
-          <a:p/>
+          <a:p>
+            <a:pPr/>
+            <a:endParaRPr/>
+          </a:p>
         </p:txBody>
       </p:sp>
       <p:sp>
@@ -1011,7 +1020,10 @@
         </p:spPr>
         <p:txBody>
           <a:bodyPr/>
-          <a:p/>
+          <a:p>
+            <a:pPr/>
+            <a:endParaRPr/>
+          </a:p>
         </p:txBody>
       </p:sp>
       <p:sp>
@@ -1134,7 +1146,7 @@
   <p:cSld>
     <p:spTree>
       <p:nvGrpSpPr>
-        <p:cNvPr id="13" name="" descr="&lt;Slide style={{ background: '#0E3F8C', width: '1280px', height: '720px', padding: '0 40px' }}&gt;&#10;  &lt;Box style={{ flexDirection: 'column', width: '100%', height: '100%' }}&gt;&#10;    &lt;Box style={{ flex: 1, flexDirection: 'row', alignItems: 'center', gap: 40 }}&gt;&#10;      &lt;Box style={{ width: '30%', flexDirection: 'column', alignItems: 'center', justifyContent: 'center' }}&gt;&#10;        &lt;Text style={{ fontSize: 180, fontWeight: 'bold', color: '#FFFFFF', lineHeight: 1 }}&gt;10&lt;/Text&gt;&#10;        &lt;Text style={{ fontSize: 22, color: '#C9D9EF', marginTop: 10, fontWeight: 'bold' }}&gt;个可证明的创新点&lt;/Text&gt;&#10;      &lt;/Box&gt;&#10;      &lt;Box style={{ flex: 1, flexDirection: 'column', gap: 14 }}&gt;&#10;        {[&#10;          '双模式数据源抽象，一键切换可兜底',&#10;          '6 类可解释规则，每条报警带原因',&#10;          '边沿触发 + 滞回，不刷屏',&#10;          '设备健康度模型，断线如实离线',&#10;          '设备离线/恢复事件，处置闭环',&#10;          'SQLite 五表 + 全程审计',&#10;          '历史动态阈值，三端一致',&#10;          '硬件本地双重预警',&#10;          '离线可用，不依赖网络',&#10;          '28 项测试的完整工程化',&#10;        ].map((item, idx) =&gt; (&#10;          &lt;Box key={idx} style={{ flexDirection: 'row', alignItems: 'center', gap: 14 }}&gt;&#10;            &lt;Text style={{ fontSize: 18, fontWeight: 'bold', color: '#FFC107', width: 30 }}&gt;{idx + 1}&lt;/Text&gt;&#10;            &lt;Text style={{ fontSize: 19, color: '#FFFFFF' }}&gt;{item}&lt;/Text&gt;&#10;          &lt;/Box&gt;&#10;        ))}&#10;      &lt;/Box&gt;&#10;    &lt;/Box&gt;&#10;    &lt;Box style={{ height: 100, flexDirection: 'column', justifyContent: 'center', alignItems: 'center', borderTop: '1px solid #3D5B8C' }}&gt;&#10;      &lt;Text style={{ fontSize: 26, fontWeight: 'bold', color: '#FFFFFF', letterSpacing: 2 }}&gt;说得出口，必拿得出证据&lt;/Text&gt;&#10;      &lt;Text style={{ fontSize: 16, color: '#C9D9EF', marginTop: 10 }}&gt;感谢各位评委 · 展望：HTTP 备份通道 · 多测点扩展&lt;/Text&gt;&#10;    &lt;/Box&gt;&#10;  &lt;/Box&gt;&#10;&lt;/Slide&gt;&#10;"/>
+        <p:cNvPr id="13" name=""/>
         <p:cNvGrpSpPr/>
         <p:nvPr/>
       </p:nvGrpSpPr>
@@ -1167,7 +1179,10 @@
         </p:spPr>
         <p:txBody>
           <a:bodyPr/>
-          <a:p/>
+          <a:p>
+            <a:pPr/>
+            <a:endParaRPr/>
+          </a:p>
         </p:txBody>
       </p:sp>
       <p:sp>
@@ -2067,7 +2082,10 @@
         </p:spPr>
         <p:txBody>
           <a:bodyPr/>
-          <a:p/>
+          <a:p>
+            <a:pPr/>
+            <a:endParaRPr/>
+          </a:p>
         </p:txBody>
       </p:sp>
       <p:sp>
@@ -2210,7 +2228,7 @@
   <p:cSld>
     <p:spTree>
       <p:nvGrpSpPr>
-        <p:cNvPr id="40" name="" descr="&lt;Slide style={{ background: '#FFFFFF', width: '1280px', height: '720px', padding: '0 40px' }}&gt;&#10;  &lt;Box style={{ flexDirection: 'column', width: '100%', height: '100%' }}&gt;&#10;    &lt;Box style={{ height: 88, flexDirection: 'row', alignItems: 'center', justifyContent: 'space-between', borderBottom: '2px solid #1E4FA8' }}&gt;&#10;      &lt;Text style={{ fontSize: 32, fontWeight: 'bold', color: '#0E3F8C' }}&gt;为什么做 —— 桥梁受载监测的痛点&lt;/Text&gt;&#10;      &lt;Text style={{ fontSize: 14, color: '#8B97A8' }}&gt;桥体卫士&lt;/Text&gt;&#10;    &lt;/Box&gt;&#10;    &lt;Box style={{ flex: 1, flexDirection: 'row', gap: 28, padding: '18px 0' }}&gt;&#10;      &lt;Box style={{ width: '52%', flexDirection: 'column', gap: 16 }}&gt;&#10;        &lt;Box style={{ flex: 1, background: '#F7F9FC', border: '1px solid #D6DCE5', borderRadius: 10, padding: 22, flexDirection: 'column', justifyContent: 'center' }}&gt;&#10;          &lt;Text style={{ fontSize: 18, fontWeight: 'bold', color: '#D9534F' }}&gt;真实桥梁监测的难点&lt;/Text&gt;&#10;          &lt;Text style={{ fontSize: 20, color: '#4A5568', marginTop: 14, lineHeight: 1.6 }}&gt;设备昂贵 · 部署困难 · 依赖工程级标定 · 难以在教学与演示中复现&lt;/Text&gt;&#10;        &lt;/Box&gt;&#10;        &lt;Box style={{ flex: 1, background: '#E8EFF8', border: '1px solid #3D7BD9', borderRadius: 10, padding: 22, flexDirection: 'column', justifyContent: 'center' }}&gt;&#10;          &lt;Text style={{ fontSize: 18, fontWeight: 'bold', color: '#0E3F8C' }}&gt;我们的方案&lt;/Text&gt;&#10;          &lt;Text style={{ fontSize: 20, color: '#1A2230', marginTop: 14, lineHeight: 1.6 }}&gt;低成本缩尺原型 · 完整演示「采集 → 判断 → 存储 → 展示 → 处置」全闭环&lt;/Text&gt;&#10;        &lt;/Box&gt;&#10;      &lt;/Box&gt;&#10;      &lt;Box style={{ flex: 1, flexDirection: 'column', justifyContent: 'center' }}&gt;&#10;        &lt;Text style={{ fontSize: 24, fontWeight: 'bold', color: '#0E3F8C', lineHeight: 1.5 }}&gt;桥梁长期受载，结构健康关乎安全&lt;/Text&gt;&#10;        &lt;Text style={{ fontSize: 20, color: '#4A5568', marginTop: 16, lineHeight: 1.7 }}&gt;我们用 ESP32 + 压力传感器 + Flask 平台，做一个可运行、可解释、可追溯的受载监测原型，把整条监测链路完整呈现出来。&lt;/Text&gt;&#10;        &lt;Box style={{ marginTop: 20, padding: '12px 16px', background: '#F0F5FC', borderRadius: 8 }}&gt;&#10;          &lt;Text style={{ fontSize: 18, color: '#1E4FA8', fontWeight: 'bold' }}&gt;定位：缩尺模型受载变化模拟（诚实边界，不夸大精度）&lt;/Text&gt;&#10;        &lt;/Box&gt;&#10;      &lt;/Box&gt;&#10;    &lt;/Box&gt;&#10;    &lt;Box style={{ height: 40, flexDirection: 'row', justifyContent: 'space-between', alignItems: 'center', borderTop: '1px solid #E5E7EB' }}&gt;&#10;      &lt;Text style={{ fontSize: 14, color: '#8B97A8' }}&gt;桥体卫士 · 桥梁结构健康监测缩尺原型&lt;/Text&gt;&#10;      &lt;Text style={{ fontSize: 14, color: '#1E4FA8', fontWeight: 'bold' }}&gt;02 / 10&lt;/Text&gt;&#10;    &lt;/Box&gt;&#10;  &lt;/Box&gt;&#10;&lt;/Slide&gt;&#10;"/>
+        <p:cNvPr id="40" name=""/>
         <p:cNvGrpSpPr/>
         <p:nvPr/>
       </p:nvGrpSpPr>
@@ -2243,7 +2261,10 @@
         </p:spPr>
         <p:txBody>
           <a:bodyPr/>
-          <a:p/>
+          <a:p>
+            <a:pPr/>
+            <a:endParaRPr/>
+          </a:p>
         </p:txBody>
       </p:sp>
       <p:sp>
@@ -2283,7 +2304,10 @@
         </p:spPr>
         <p:txBody>
           <a:bodyPr/>
-          <a:p/>
+          <a:p>
+            <a:pPr/>
+            <a:endParaRPr/>
+          </a:p>
         </p:txBody>
       </p:sp>
       <p:sp>
@@ -2404,7 +2428,10 @@
         </p:spPr>
         <p:txBody>
           <a:bodyPr/>
-          <a:p/>
+          <a:p>
+            <a:pPr/>
+            <a:endParaRPr/>
+          </a:p>
         </p:txBody>
       </p:sp>
       <p:sp>
@@ -2565,7 +2592,10 @@
         </p:spPr>
         <p:txBody>
           <a:bodyPr/>
-          <a:p/>
+          <a:p>
+            <a:pPr/>
+            <a:endParaRPr/>
+          </a:p>
         </p:txBody>
       </p:sp>
       <p:sp>
@@ -2875,7 +2905,10 @@
         </p:spPr>
         <p:txBody>
           <a:bodyPr/>
-          <a:p/>
+          <a:p>
+            <a:pPr/>
+            <a:endParaRPr/>
+          </a:p>
         </p:txBody>
       </p:sp>
       <p:sp>
@@ -2950,7 +2983,10 @@
         </p:spPr>
         <p:txBody>
           <a:bodyPr/>
-          <a:p/>
+          <a:p>
+            <a:pPr/>
+            <a:endParaRPr/>
+          </a:p>
         </p:txBody>
       </p:sp>
       <p:sp>
@@ -3053,7 +3089,7 @@
   <p:cSld>
     <p:spTree>
       <p:nvGrpSpPr>
-        <p:cNvPr id="58" name="" descr="&lt;Slide style={{ background: '#FFFFFF', width: '1280px', height: '720px', padding: '0 40px' }}&gt;&#10;  &lt;Box style={{ flexDirection: 'column', width: '100%', height: '100%' }}&gt;&#10;    &lt;Box style={{ height: 88, flexDirection: 'row', alignItems: 'center', justifyContent: 'space-between', borderBottom: '2px solid #1E4FA8' }}&gt;&#10;      &lt;Text style={{ fontSize: 32, fontWeight: 'bold', color: '#0E3F8C' }}&gt;六层架构 —— 数据源可插拔&lt;/Text&gt;&#10;      &lt;Text style={{ fontSize: 14, color: '#8B97A8' }}&gt;桥体卫士&lt;/Text&gt;&#10;    &lt;/Box&gt;&#10;    &lt;Box style={{ flex: 1, flexDirection: 'row', gap: 0, padding: '18px 0' }}&gt;&#10;      &lt;Box style={{ width: '28%', background: '#0E3F8C', borderRadius: 10, padding: 24, flexDirection: 'column', justifyContent: 'center' }}&gt;&#10;        &lt;Text style={{ fontSize: 30, fontWeight: 'bold', color: '#FFFFFF' }}&gt;六层解耦&lt;/Text&gt;&#10;        &lt;Text style={{ fontSize: 18, color: '#C9D9EF', marginTop: 14, lineHeight: 1.6 }}&gt;核心是采集层 DataSource 抽象：换数据源，不改上层逻辑&lt;/Text&gt;&#10;      &lt;/Box&gt;&#10;      &lt;Box style={{ flex: 1, flexDirection: 'column', justifyContent: 'space-between', marginLeft: 24 }}&gt;&#10;        {[&#10;          { n: '01', t: '硬件层', d: 'ESP32 + HX711 + 传感器' },&#10;          { n: '02', t: '采集层', d: 'DataSource 抽象（模拟/串口）' },&#10;          { n: '03', t: '规则引擎', d: '6 类可解释规则' },&#10;          { n: '04', t: '数据层', d: 'SQLite 五表 + CSV 导出' },&#10;          { n: '05', t: '服务层', d: 'Flask + 统一鉴权' },&#10;          { n: '06', t: '展示层', d: '实时大屏 + 历史 + 设置' },&#10;        ].map((item, idx) =&gt; (&#10;          &lt;Box key={idx} style={{ flexDirection: 'row', alignItems: 'center', gap: 16, background: idx === 1 ? '#E8EFF8' : '#F7F9FC', borderRadius: 8, padding: '10px 16px' }}&gt;&#10;            &lt;Text style={{ fontSize: 20, fontWeight: 'bold', color: '#1E4FA8', width: 40 }}&gt;{item.n}&lt;/Text&gt;&#10;            &lt;Text style={{ fontSize: 20, fontWeight: 'bold', color: '#0E3F8C', width: 90 }}&gt;{item.t}&lt;/Text&gt;&#10;            &lt;Text style={{ fontSize: 17, color: '#4A5568', flex: 1 }}&gt;{item.d}&lt;/Text&gt;&#10;          &lt;/Box&gt;&#10;        ))}&#10;      &lt;/Box&gt;&#10;    &lt;/Box&gt;&#10;    &lt;Box style={{ height: 40, flexDirection: 'row', justifyContent: 'space-between', alignItems: 'center', borderTop: '1px solid #E5E7EB' }}&gt;&#10;      &lt;Text style={{ fontSize: 14, color: '#8B97A8' }}&gt;桥体卫士 · 桥梁结构健康监测缩尺原型&lt;/Text&gt;&#10;      &lt;Text style={{ fontSize: 14, color: '#1E4FA8', fontWeight: 'bold' }}&gt;03 / 10&lt;/Text&gt;&#10;    &lt;/Box&gt;&#10;  &lt;/Box&gt;&#10;&lt;/Slide&gt;&#10;"/>
+        <p:cNvPr id="58" name=""/>
         <p:cNvGrpSpPr/>
         <p:nvPr/>
       </p:nvGrpSpPr>
@@ -3086,7 +3122,10 @@
         </p:spPr>
         <p:txBody>
           <a:bodyPr/>
-          <a:p/>
+          <a:p>
+            <a:pPr/>
+            <a:endParaRPr/>
+          </a:p>
         </p:txBody>
       </p:sp>
       <p:sp>
@@ -3126,7 +3165,10 @@
         </p:spPr>
         <p:txBody>
           <a:bodyPr/>
-          <a:p/>
+          <a:p>
+            <a:pPr/>
+            <a:endParaRPr/>
+          </a:p>
         </p:txBody>
       </p:sp>
       <p:sp>
@@ -3242,7 +3284,10 @@
         </p:spPr>
         <p:txBody>
           <a:bodyPr/>
-          <a:p/>
+          <a:p>
+            <a:pPr/>
+            <a:endParaRPr/>
+          </a:p>
         </p:txBody>
       </p:sp>
       <p:sp>
@@ -3360,7 +3405,10 @@
         </p:spPr>
         <p:txBody>
           <a:bodyPr/>
-          <a:p/>
+          <a:p>
+            <a:pPr/>
+            <a:endParaRPr/>
+          </a:p>
         </p:txBody>
       </p:sp>
       <p:sp>
@@ -3501,7 +3549,10 @@
         </p:spPr>
         <p:txBody>
           <a:bodyPr/>
-          <a:p/>
+          <a:p>
+            <a:pPr/>
+            <a:endParaRPr/>
+          </a:p>
         </p:txBody>
       </p:sp>
       <p:sp>
@@ -3662,7 +3713,10 @@
         </p:spPr>
         <p:txBody>
           <a:bodyPr/>
-          <a:p/>
+          <a:p>
+            <a:pPr/>
+            <a:endParaRPr/>
+          </a:p>
         </p:txBody>
       </p:sp>
       <p:sp>
@@ -3803,7 +3857,10 @@
         </p:spPr>
         <p:txBody>
           <a:bodyPr/>
-          <a:p/>
+          <a:p>
+            <a:pPr/>
+            <a:endParaRPr/>
+          </a:p>
         </p:txBody>
       </p:sp>
       <p:sp>
@@ -3964,7 +4021,10 @@
         </p:spPr>
         <p:txBody>
           <a:bodyPr/>
-          <a:p/>
+          <a:p>
+            <a:pPr/>
+            <a:endParaRPr/>
+          </a:p>
         </p:txBody>
       </p:sp>
       <p:sp>
@@ -4105,7 +4165,10 @@
         </p:spPr>
         <p:txBody>
           <a:bodyPr/>
-          <a:p/>
+          <a:p>
+            <a:pPr/>
+            <a:endParaRPr/>
+          </a:p>
         </p:txBody>
       </p:sp>
       <p:sp>
@@ -4290,7 +4353,10 @@
         </p:spPr>
         <p:txBody>
           <a:bodyPr/>
-          <a:p/>
+          <a:p>
+            <a:pPr/>
+            <a:endParaRPr/>
+          </a:p>
         </p:txBody>
       </p:sp>
       <p:sp>
@@ -4393,7 +4459,7 @@
   <p:cSld>
     <p:spTree>
       <p:nvGrpSpPr>
-        <p:cNvPr id="93" name="" descr="&lt;Slide style={{ background: '#FFFFFF', width: '1280px', height: '720px', padding: '0 40px' }}&gt;&#10;  &lt;Box style={{ flexDirection: 'column', width: '100%', height: '100%' }}&gt;&#10;    &lt;Box style={{ height: 88, flexDirection: 'row', alignItems: 'center', justifyContent: 'space-between', borderBottom: '2px solid #1E4FA8' }}&gt;&#10;      &lt;Text style={{ fontSize: 32, fontWeight: 'bold', color: '#0E3F8C' }}&gt;双模式数据源 · 断线不造假&lt;/Text&gt;&#10;      &lt;Text style={{ fontSize: 14, color: '#8B97A8' }}&gt;桥体卫士&lt;/Text&gt;&#10;    &lt;/Box&gt;&#10;    &lt;Box style={{ flex: 1, flexDirection: 'row', gap: 24, padding: '18px 0' }}&gt;&#10;      &lt;Box style={{ flex: 1.5, flexDirection: 'column', gap: 14 }}&gt;&#10;        &lt;Box style={{ flexDirection: 'row', alignItems: 'center', gap: 12, background: '#F0F5FC', borderRadius: 8, padding: '12px 16px' }}&gt;&#10;          &lt;Text style={{ fontSize: 18, fontWeight: 'bold', color: '#1E4FA8' }}&gt;DATA_SOURCE&lt;/Text&gt;&#10;          &lt;Text style={{ fontSize: 18, color: '#4A5568' }}&gt;环境变量一键切换，无需改代码&lt;/Text&gt;&#10;        &lt;/Box&gt;&#10;        &lt;Box style={{ flex: 1, background: '#F7F9FC', border: '1px solid #D6DCE5', borderRadius: 10, padding: 18 }}&gt;&#10;          &lt;Text style={{ fontSize: 20, fontWeight: 'bold', color: '#0E3F8C' }}&gt;模拟模式&lt;/Text&gt;&#10;          &lt;Text style={{ fontSize: 17, color: '#4A5568', marginTop: 10, lineHeight: 1.6 }}&gt;内置模拟器生成数据，用于开发、测试与现场兜底，大屏明确标注「数据源：模拟」。&lt;/Text&gt;&#10;        &lt;/Box&gt;&#10;        &lt;Box style={{ flex: 1, background: '#F7F9FC', border: '1px solid #3D7BD9', borderRadius: 10, padding: 18 }}&gt;&#10;          &lt;Text style={{ fontSize: 20, fontWeight: 'bold', color: '#0E3F8C' }}&gt;真实串口模式&lt;/Text&gt;&#10;          &lt;Text style={{ fontSize: 17, color: '#4A5568', marginTop: 10, lineHeight: 1.6 }}&gt;USB 串口直连 ESP32，离线可用、可验证；大屏标注「数据源：串口(真实)」。&lt;/Text&gt;&#10;        &lt;/Box&gt;&#10;      &lt;/Box&gt;&#10;      &lt;Box style={{ flex: 1, flexDirection: 'column', gap: 12, background: '#E8EFF8', borderRadius: 10, padding: 20 }}&gt;&#10;        &lt;Text style={{ fontSize: 20, fontWeight: 'bold', color: '#0E3F8C' }}&gt;设备健康度三要素&lt;/Text&gt;&#10;        &lt;Box style={{ flexDirection: 'row', gap: 10, alignItems: 'center' }}&gt;&#10;          &lt;Box style={{ width: 10, height: 10, borderRadius: 5, background: '#1E4FA8' }} /&gt;&#10;          &lt;Text style={{ fontSize: 17, color: '#1A2230' }}&gt;心跳时间戳&lt;/Text&gt;&#10;        &lt;/Box&gt;&#10;        &lt;Box style={{ flexDirection: 'row', gap: 10, alignItems: 'center' }}&gt;&#10;          &lt;Box style={{ width: 10, height: 10, borderRadius: 5, background: '#3D7BD9' }} /&gt;&#10;          &lt;Text style={{ fontSize: 17, color: '#1A2230' }}&gt;连续超时计数&lt;/Text&gt;&#10;        &lt;/Box&gt;&#10;        &lt;Box style={{ flexDirection: 'row', gap: 10, alignItems: 'center' }}&gt;&#10;          &lt;Box style={{ width: 10, height: 10, borderRadius: 5, background: '#D9534F' }} /&gt;&#10;          &lt;Text style={{ fontSize: 17, color: '#1A2230' }}&gt;最近错误原因&lt;/Text&gt;&#10;        &lt;/Box&gt;&#10;        &lt;Box style={{ marginTop: 10, padding: '12px 14px', background: '#FFFFFF', borderRadius: 8, border: '1px solid #D9534F' }}&gt;&#10;          &lt;Text style={{ fontSize: 16, color: '#D9534F', fontWeight: 'bold', lineHeight: 1.5 }}&gt;断线立即显示「设备离线」，绝不伪造在线或数据&lt;/Text&gt;&#10;        &lt;/Box&gt;&#10;      &lt;/Box&gt;&#10;    &lt;/Box&gt;&#10;    &lt;Box style={{ height: 40, flexDirection: 'row', justifyContent: 'space-between', alignItems: 'center', borderTop: '1px solid #E5E7EB' }}&gt;&#10;      &lt;Text style={{ fontSize: 14, color: '#8B97A8' }}&gt;桥体卫士 · 桥梁结构健康监测缩尺原型&lt;/Text&gt;&#10;      &lt;Text style={{ fontSize: 14, color: '#1E4FA8', fontWeight: 'bold' }}&gt;04 / 10&lt;/Text&gt;&#10;    &lt;/Box&gt;&#10;  &lt;/Box&gt;&#10;&lt;/Slide&gt;&#10;"/>
+        <p:cNvPr id="93" name=""/>
         <p:cNvGrpSpPr/>
         <p:nvPr/>
       </p:nvGrpSpPr>
@@ -4426,7 +4492,10 @@
         </p:spPr>
         <p:txBody>
           <a:bodyPr/>
-          <a:p/>
+          <a:p>
+            <a:pPr/>
+            <a:endParaRPr/>
+          </a:p>
         </p:txBody>
       </p:sp>
       <p:sp>
@@ -4466,7 +4535,10 @@
         </p:spPr>
         <p:txBody>
           <a:bodyPr/>
-          <a:p/>
+          <a:p>
+            <a:pPr/>
+            <a:endParaRPr/>
+          </a:p>
         </p:txBody>
       </p:sp>
       <p:sp>
@@ -4582,7 +4654,10 @@
         </p:spPr>
         <p:txBody>
           <a:bodyPr/>
-          <a:p/>
+          <a:p>
+            <a:pPr/>
+            <a:endParaRPr/>
+          </a:p>
         </p:txBody>
       </p:sp>
       <p:sp>
@@ -4683,7 +4758,10 @@
         </p:spPr>
         <p:txBody>
           <a:bodyPr/>
-          <a:p/>
+          <a:p>
+            <a:pPr/>
+            <a:endParaRPr/>
+          </a:p>
         </p:txBody>
       </p:sp>
       <p:sp>
@@ -4784,7 +4862,10 @@
         </p:spPr>
         <p:txBody>
           <a:bodyPr/>
-          <a:p/>
+          <a:p>
+            <a:pPr/>
+            <a:endParaRPr/>
+          </a:p>
         </p:txBody>
       </p:sp>
       <p:sp>
@@ -4950,7 +5031,10 @@
         </p:spPr>
         <p:txBody>
           <a:bodyPr/>
-          <a:p/>
+          <a:p>
+            <a:pPr/>
+            <a:endParaRPr/>
+          </a:p>
         </p:txBody>
       </p:sp>
       <p:sp>
@@ -5011,7 +5095,10 @@
         </p:spPr>
         <p:txBody>
           <a:bodyPr/>
-          <a:p/>
+          <a:p>
+            <a:pPr/>
+            <a:endParaRPr/>
+          </a:p>
         </p:txBody>
       </p:sp>
       <p:sp>
@@ -5072,7 +5159,10 @@
         </p:spPr>
         <p:txBody>
           <a:bodyPr/>
-          <a:p/>
+          <a:p>
+            <a:pPr/>
+            <a:endParaRPr/>
+          </a:p>
         </p:txBody>
       </p:sp>
       <p:sp>
@@ -5133,7 +5223,10 @@
         </p:spPr>
         <p:txBody>
           <a:bodyPr/>
-          <a:p/>
+          <a:p>
+            <a:pPr/>
+            <a:endParaRPr/>
+          </a:p>
         </p:txBody>
       </p:sp>
       <p:sp>
@@ -5199,7 +5292,10 @@
         </p:spPr>
         <p:txBody>
           <a:bodyPr/>
-          <a:p/>
+          <a:p>
+            <a:pPr/>
+            <a:endParaRPr/>
+          </a:p>
         </p:txBody>
       </p:sp>
       <p:sp>
@@ -5274,7 +5370,10 @@
         </p:spPr>
         <p:txBody>
           <a:bodyPr/>
-          <a:p/>
+          <a:p>
+            <a:pPr/>
+            <a:endParaRPr/>
+          </a:p>
         </p:txBody>
       </p:sp>
       <p:sp>
@@ -5377,7 +5476,7 @@
   <p:cSld>
     <p:spTree>
       <p:nvGrpSpPr>
-        <p:cNvPr id="120" name="" descr="&lt;Slide style={{ background: '#FFFFFF', width: '1280px', height: '720px', padding: '0 40px' }}&gt;&#10;  &lt;Box style={{ flexDirection: 'column', width: '100%', height: '100%' }}&gt;&#10;    &lt;Box style={{ height: 88, flexDirection: 'row', alignItems: 'center', justifyContent: 'space-between', borderBottom: '2px solid #1E4FA8' }}&gt;&#10;      &lt;Text style={{ fontSize: 32, fontWeight: 'bold', color: '#0E3F8C' }}&gt;6 类可解释规则 —— 每条报警说清「为什么」&lt;/Text&gt;&#10;      &lt;Text style={{ fontSize: 14, color: '#8B97A8' }}&gt;桥体卫士&lt;/Text&gt;&#10;    &lt;/Box&gt;&#10;    &lt;Box style={{ flex: 1, flexDirection: 'row', gap: 28, padding: '18px 0' }}&gt;&#10;      &lt;Box style={{ width: '30%', flexDirection: 'column', justifyContent: 'center', alignItems: 'center', background: '#E8EFF8', borderRadius: 12 }}&gt;&#10;        &lt;Text style={{ fontSize: 150, fontWeight: 'bold', color: '#0E3F8C', lineHeight: 1 }}&gt;6&lt;/Text&gt;&#10;        &lt;Text style={{ fontSize: 24, fontWeight: 'bold', color: '#1E4FA8', marginTop: 8 }}&gt;类可解释规则&lt;/Text&gt;&#10;        &lt;Text style={{ fontSize: 16, color: '#4A5568', marginTop: 10 }}&gt;边沿触发 + 滞回 · 不刷屏&lt;/Text&gt;&#10;      &lt;/Box&gt;&#10;      &lt;Box style={{ flex: 1, flexDirection: 'column', justifyContent: 'center', gap: 12 }}&gt;&#10;        {[&#10;          { t: '阈值超限', d: '应变值超过阈值，分级：预警/报警/严重' },&#10;          { t: '变化率突变', d: '相邻采样周期变化量超限' },&#10;          { t: '持续超限', d: '连续 N 点超限（区别于单点毛刺）' },&#10;          { t: '短时波动', d: '短窗口内峰谷差超限' },&#10;          { t: '基线偏移', d: '近期均值相对历史基线漂移超限' },&#10;          { t: '设备离线', d: '心跳超时，触发离线/恢复事件' },&#10;        ].map((item, idx) =&gt; (&#10;          &lt;Box key={idx} style={{ flexDirection: 'row', alignItems: 'center', gap: 14, background: '#F7F9FC', border: '1px solid #D6DCE5', borderRadius: 8, padding: '10px 14px' }}&gt;&#10;            &lt;Text style={{ fontSize: 18, fontWeight: 'bold', color: '#1E4FA8', width: 90 }}&gt;{item.t}&lt;/Text&gt;&#10;            &lt;Text style={{ fontSize: 17, color: '#4A5568', flex: 1 }}&gt;{item.d}&lt;/Text&gt;&#10;          &lt;/Box&gt;&#10;        ))}&#10;      &lt;/Box&gt;&#10;    &lt;/Box&gt;&#10;    &lt;Box style={{ height: 64, flexDirection: 'row', justifyContent: 'space-between', alignItems: 'center', borderTop: '1px solid #E5E7EB' }}&gt;&#10;      &lt;Text style={{ fontSize: 15, color: '#8B97A8' }}&gt;桥体卫士 · 桥梁结构健康监测缩尺原型&lt;/Text&gt;&#10;      &lt;Text style={{ fontSize: 15, color: '#0E3F8C', fontWeight: 'bold' }}&gt;示例：「应变值 135.00 με 超过阈值 120.00 με」&lt;/Text&gt;&#10;    &lt;/Box&gt;&#10;  &lt;/Box&gt;&#10;&lt;/Slide&gt;&#10;"/>
+        <p:cNvPr id="120" name=""/>
         <p:cNvGrpSpPr/>
         <p:nvPr/>
       </p:nvGrpSpPr>
@@ -5410,7 +5509,10 @@
         </p:spPr>
         <p:txBody>
           <a:bodyPr/>
-          <a:p/>
+          <a:p>
+            <a:pPr/>
+            <a:endParaRPr/>
+          </a:p>
         </p:txBody>
       </p:sp>
       <p:sp>
@@ -5450,7 +5552,10 @@
         </p:spPr>
         <p:txBody>
           <a:bodyPr/>
-          <a:p/>
+          <a:p>
+            <a:pPr/>
+            <a:endParaRPr/>
+          </a:p>
         </p:txBody>
       </p:sp>
       <p:sp>
@@ -5576,7 +5681,10 @@
         </p:spPr>
         <p:txBody>
           <a:bodyPr/>
-          <a:p/>
+          <a:p>
+            <a:pPr/>
+            <a:endParaRPr/>
+          </a:p>
         </p:txBody>
       </p:sp>
       <p:sp>
@@ -5752,7 +5860,10 @@
         </p:spPr>
         <p:txBody>
           <a:bodyPr/>
-          <a:p/>
+          <a:p>
+            <a:pPr/>
+            <a:endParaRPr/>
+          </a:p>
         </p:txBody>
       </p:sp>
       <p:sp>
@@ -5893,7 +6004,10 @@
         </p:spPr>
         <p:txBody>
           <a:bodyPr/>
-          <a:p/>
+          <a:p>
+            <a:pPr/>
+            <a:endParaRPr/>
+          </a:p>
         </p:txBody>
       </p:sp>
       <p:sp>
@@ -5994,7 +6108,10 @@
         </p:spPr>
         <p:txBody>
           <a:bodyPr/>
-          <a:p/>
+          <a:p>
+            <a:pPr/>
+            <a:endParaRPr/>
+          </a:p>
         </p:txBody>
       </p:sp>
       <p:sp>
@@ -6115,7 +6232,10 @@
         </p:spPr>
         <p:txBody>
           <a:bodyPr/>
-          <a:p/>
+          <a:p>
+            <a:pPr/>
+            <a:endParaRPr/>
+          </a:p>
         </p:txBody>
       </p:sp>
       <p:sp>
@@ -6216,7 +6336,10 @@
         </p:spPr>
         <p:txBody>
           <a:bodyPr/>
-          <a:p/>
+          <a:p>
+            <a:pPr/>
+            <a:endParaRPr/>
+          </a:p>
         </p:txBody>
       </p:sp>
       <p:sp>
@@ -6317,7 +6440,10 @@
         </p:spPr>
         <p:txBody>
           <a:bodyPr/>
-          <a:p/>
+          <a:p>
+            <a:pPr/>
+            <a:endParaRPr/>
+          </a:p>
         </p:txBody>
       </p:sp>
       <p:sp>
@@ -6447,7 +6573,10 @@
         </p:spPr>
         <p:txBody>
           <a:bodyPr/>
-          <a:p/>
+          <a:p>
+            <a:pPr/>
+            <a:endParaRPr/>
+          </a:p>
         </p:txBody>
       </p:sp>
       <p:sp>
@@ -6590,7 +6719,7 @@
   <p:cSld>
     <p:spTree>
       <p:nvGrpSpPr>
-        <p:cNvPr id="150" name="" descr="&lt;Slide style={{ background: '#FFFFFF', width: '1280px', height: '720px', padding: '0 40px' }}&gt;&#10;  &lt;Box style={{ flexDirection: 'column', width: '100%', height: '100%' }}&gt;&#10;    &lt;Box style={{ height: 88, flexDirection: 'row', alignItems: 'center', justifyContent: 'space-between', borderBottom: '2px solid #1E4FA8' }}&gt;&#10;      &lt;Text style={{ fontSize: 32, fontWeight: 'bold', color: '#0E3F8C' }}&gt;SQLite 五表 + 全程审计&lt;/Text&gt;&#10;      &lt;Text style={{ fontSize: 14, color: '#8B97A8' }}&gt;桥体卫士&lt;/Text&gt;&#10;    &lt;/Box&gt;&#10;    &lt;Box style={{ flex: 1, flexDirection: 'row', gap: 24, padding: '18px 0' }}&gt;&#10;      &lt;Box style={{ width: '30%', background: '#0E3F8C', borderRadius: 10, padding: 24, flexDirection: 'column', justifyContent: 'center' }}&gt;&#10;        &lt;Text style={{ fontSize: 28, fontWeight: 'bold', color: '#FFFFFF' }}&gt;统一数据模型&lt;/Text&gt;&#10;        &lt;Text style={{ fontSize: 17, color: '#C9D9EF', marginTop: 14, lineHeight: 1.7 }}&gt;统一时间/设备/状态字段，参数变更全程留痕，历史可筛选、可导出 CSV&lt;/Text&gt;&#10;      &lt;/Box&gt;&#10;      &lt;Box style={{ flex: 1, flexDirection: 'column', justifyContent: 'center' }}&gt;&#10;        &lt;Table&#10;          style={{ width: '100%', height: 420 }}&#10;          defaultTextStyle={{ fontSize: 17, textAlign: 'center', color: '#1A2230' }}&#10;          defaultCellStyle={{ border: { left: { width: 1, color: '#D6DCE5' }, right: { width: 1, color: '#D6DCE5' }, top: { width: 1, color: '#D6DCE5' }, bottom: { width: 1, color: '#D6DCE5' } } }}&#10;          cells={[&#10;            [&#10;              { text: '表', textStyle: { bold: true, color: '#FFFFFF' }, cellStyle: { background: { color: '#0E3F8C' } } },&#10;              { text: '内容', textStyle: { bold: true, color: '#FFFFFF' }, cellStyle: { background: { color: '#0E3F8C' } } },&#10;              { text: '作用', textStyle: { bold: true, color: '#FFFFFF' }, cellStyle: { background: { color: '#0E3F8C' } } },&#10;            ],&#10;            [{ text: 'samples', textStyle: { bold: true } }, '采样数据', '实时曲线与历史比对'],&#10;            [{ text: 'device_heartbeat', textStyle: { bold: true } }, '心跳/离线/恢复事件', '设备健康度追溯'],&#10;            [{ text: 'alarms', textStyle: { bold: true } }, '报警（规则+原因+状态）', '可解释报警与处置'],&#10;            [{ text: 'settings', textStyle: { bold: true } }, '参数设置历史', '阈值/周期变更留痕'],&#10;            [{ text: 'audit', textStyle: { bold: true } }, '操作审计', '谁在何时做了什么'],&#10;          ]}&#10;        /&gt;&#10;      &lt;/Box&gt;&#10;    &lt;/Box&gt;&#10;    &lt;Box style={{ height: 40, flexDirection: 'row', justifyContent: 'space-between', alignItems: 'center', borderTop: '1px solid #E5E7EB' }}&gt;&#10;      &lt;Text style={{ fontSize: 14, color: '#8B97A8' }}&gt;桥体卫士 · 桥梁结构健康监测缩尺原型&lt;/Text&gt;&#10;      &lt;Text style={{ fontSize: 14, color: '#1E4FA8', fontWeight: 'bold' }}&gt;06 / 10&lt;/Text&gt;&#10;    &lt;/Box&gt;&#10;  &lt;/Box&gt;&#10;&lt;/Slide&gt;&#10;"/>
+        <p:cNvPr id="150" name=""/>
         <p:cNvGrpSpPr/>
         <p:nvPr/>
       </p:nvGrpSpPr>
@@ -6623,7 +6752,10 @@
         </p:spPr>
         <p:txBody>
           <a:bodyPr/>
-          <a:p/>
+          <a:p>
+            <a:pPr/>
+            <a:endParaRPr/>
+          </a:p>
         </p:txBody>
       </p:sp>
       <p:sp>
@@ -6663,7 +6795,10 @@
         </p:spPr>
         <p:txBody>
           <a:bodyPr/>
-          <a:p/>
+          <a:p>
+            <a:pPr/>
+            <a:endParaRPr/>
+          </a:p>
         </p:txBody>
       </p:sp>
       <p:sp>
@@ -6789,7 +6924,10 @@
         </p:spPr>
         <p:txBody>
           <a:bodyPr/>
-          <a:p/>
+          <a:p>
+            <a:pPr/>
+            <a:endParaRPr/>
+          </a:p>
         </p:txBody>
       </p:sp>
       <p:sp>
@@ -7744,7 +7882,10 @@
         </p:spPr>
         <p:txBody>
           <a:bodyPr/>
-          <a:p/>
+          <a:p>
+            <a:pPr/>
+            <a:endParaRPr/>
+          </a:p>
         </p:txBody>
       </p:sp>
       <p:sp>
@@ -7847,7 +7988,7 @@
   <p:cSld>
     <p:spTree>
       <p:nvGrpSpPr>
-        <p:cNvPr id="162" name="" descr="&lt;Slide style={{ background: '#FFFFFF', width: '1280px', height: '720px', padding: '0 40px' }}&gt;&#10;  &lt;Box style={{ flexDirection: 'column', width: '100%', height: '100%' }}&gt;&#10;    &lt;Box style={{ height: 88, flexDirection: 'row', alignItems: 'center', justifyContent: 'space-between', borderBottom: '2px solid #1E4FA8' }}&gt;&#10;      &lt;Text style={{ fontSize: 32, fontWeight: 'bold', color: '#0E3F8C' }}&gt;安全与工程化 —— 能交付的程度&lt;/Text&gt;&#10;      &lt;Text style={{ fontSize: 14, color: '#8B97A8' }}&gt;桥体卫士&lt;/Text&gt;&#10;    &lt;/Box&gt;&#10;    &lt;Box style={{ flex: 1, flexDirection: 'row', gap: 24, padding: '18px 0' }}&gt;&#10;      &lt;Box style={{ flex: 1.5, flexDirection: 'column', gap: 14 }}&gt;&#10;        &lt;Text style={{ fontSize: 22, fontWeight: 'bold', color: '#0E3F8C' }}&gt;安全防护&lt;/Text&gt;&#10;        {[&#10;          { t: '密钥环境变量化', d: '账号、密码、SECRET_KEY 走 .env，不硬编码进源码' },&#10;          { t: '统一鉴权', d: '所有页面与 API 统一登录保护，未登录 API 返回 401' },&#10;          { t: '写接口保护', d: '清除/改参/确认等写操作受鉴权与校验约束' },&#10;        ].map((item, idx) =&gt; (&#10;          &lt;Box key={idx} style={{ flexDirection: 'row', gap: 14, background: '#F7F9FC', border: '1px solid #D6DCE5', borderRadius: 8, padding: '14px 16px', alignItems: 'center' }}&gt;&#10;            &lt;Text style={{ fontSize: 18, fontWeight: 'bold', color: '#1E4FA8', width: 150 }}&gt;{item.t}&lt;/Text&gt;&#10;            &lt;Text style={{ fontSize: 17, color: '#4A5568', flex: 1 }}&gt;{item.d}&lt;/Text&gt;&#10;          &lt;/Box&gt;&#10;        ))}&#10;      &lt;/Box&gt;&#10;      &lt;Box style={{ flex: 1, flexDirection: 'column', gap: 14, background: '#E8EFF8', borderRadius: 10, padding: 20 }}&gt;&#10;        &lt;Text style={{ fontSize: 22, fontWeight: 'bold', color: '#0E3F8C' }}&gt;工程化&lt;/Text&gt;&#10;        &lt;Box style={{ flexDirection: 'row', alignItems: 'baseline', gap: 8 }}&gt;&#10;          &lt;Text style={{ fontSize: 60, fontWeight: 'bold', color: '#1E4FA8' }}&gt;28&lt;/Text&gt;&#10;          &lt;Text style={{ fontSize: 18, color: '#4A5568' }}&gt;项自动化测试全绿&lt;/Text&gt;&#10;        &lt;/Box&gt;&#10;        &lt;Text style={{ fontSize: 17, color: '#4A5568', lineHeight: 1.6 }}&gt;规则引擎 / 数据层 / 鉴权 / API / 设备心跳 / 串口链路，覆盖核心链路&lt;/Text&gt;&#10;        &lt;Box style={{ height: 1, background: '#D6DCE5' }} /&gt;&#10;        &lt;Text style={{ fontSize: 17, color: '#4A5568', lineHeight: 1.7 }}&gt;依赖清单 requirements.txt · 配置模板 .env.example · 现场启动手册&lt;/Text&gt;&#10;      &lt;/Box&gt;&#10;    &lt;/Box&gt;&#10;    &lt;Box style={{ height: 40, flexDirection: 'row', justifyContent: 'space-between', alignItems: 'center', borderTop: '1px solid #E5E7EB' }}&gt;&#10;      &lt;Text style={{ fontSize: 14, color: '#8B97A8' }}&gt;桥体卫士 · 桥梁结构健康监测缩尺原型&lt;/Text&gt;&#10;      &lt;Text style={{ fontSize: 14, color: '#1E4FA8', fontWeight: 'bold' }}&gt;07 / 10&lt;/Text&gt;&#10;    &lt;/Box&gt;&#10;  &lt;/Box&gt;&#10;&lt;/Slide&gt;&#10;"/>
+        <p:cNvPr id="162" name=""/>
         <p:cNvGrpSpPr/>
         <p:nvPr/>
       </p:nvGrpSpPr>
@@ -7880,7 +8021,10 @@
         </p:spPr>
         <p:txBody>
           <a:bodyPr/>
-          <a:p/>
+          <a:p>
+            <a:pPr/>
+            <a:endParaRPr/>
+          </a:p>
         </p:txBody>
       </p:sp>
       <p:sp>
@@ -7920,7 +8064,10 @@
         </p:spPr>
         <p:txBody>
           <a:bodyPr/>
-          <a:p/>
+          <a:p>
+            <a:pPr/>
+            <a:endParaRPr/>
+          </a:p>
         </p:txBody>
       </p:sp>
       <p:sp>
@@ -8076,7 +8223,10 @@
         </p:spPr>
         <p:txBody>
           <a:bodyPr/>
-          <a:p/>
+          <a:p>
+            <a:pPr/>
+            <a:endParaRPr/>
+          </a:p>
         </p:txBody>
       </p:sp>
       <p:sp>
@@ -8217,7 +8367,10 @@
         </p:spPr>
         <p:txBody>
           <a:bodyPr/>
-          <a:p/>
+          <a:p>
+            <a:pPr/>
+            <a:endParaRPr/>
+          </a:p>
         </p:txBody>
       </p:sp>
       <p:sp>
@@ -8368,7 +8521,10 @@
         </p:spPr>
         <p:txBody>
           <a:bodyPr/>
-          <a:p/>
+          <a:p>
+            <a:pPr/>
+            <a:endParaRPr/>
+          </a:p>
         </p:txBody>
       </p:sp>
       <p:sp>
@@ -8504,7 +8660,10 @@
         </p:spPr>
         <p:txBody>
           <a:bodyPr/>
-          <a:p/>
+          <a:p>
+            <a:pPr/>
+            <a:endParaRPr/>
+          </a:p>
         </p:txBody>
       </p:sp>
       <p:sp>
@@ -8750,7 +8909,10 @@
         </p:spPr>
         <p:txBody>
           <a:bodyPr/>
-          <a:p/>
+          <a:p>
+            <a:pPr/>
+            <a:endParaRPr/>
+          </a:p>
         </p:txBody>
       </p:sp>
       <p:sp>
@@ -8867,7 +9029,10 @@
         </p:spPr>
         <p:txBody>
           <a:bodyPr/>
-          <a:p/>
+          <a:p>
+            <a:pPr/>
+            <a:endParaRPr/>
+          </a:p>
         </p:txBody>
       </p:sp>
       <p:sp>
@@ -8970,7 +9135,7 @@
   <p:cSld>
     <p:spTree>
       <p:nvGrpSpPr>
-        <p:cNvPr id="187" name="" descr="&lt;Slide style={{ background: '#FFFFFF', width: '1280px', height: '720px', padding: '0 40px' }}&gt;&#10;  &lt;Box style={{ flexDirection: 'column', width: '100%', height: '100%' }}&gt;&#10;    &lt;Box style={{ height: 88, flexDirection: 'row', alignItems: 'center', justifyContent: 'space-between', borderBottom: '2px solid #1E4FA8' }}&gt;&#10;      &lt;Text style={{ fontSize: 32, fontWeight: 'bold', color: '#0E3F8C' }}&gt;硬件本地双重预警&lt;/Text&gt;&#10;      &lt;Text style={{ fontSize: 14, color: '#8B97A8' }}&gt;桥体卫士&lt;/Text&gt;&#10;    &lt;/Box&gt;&#10;    &lt;Box style={{ flex: 1, flexDirection: 'column', justifyContent: 'center', gap: 20, padding: '18px 0' }}&gt;&#10;      &lt;Box style={{ flexDirection: 'row', alignItems: 'center', gap: 12 }}&gt;&#10;        {['HX711 采集', 'OLED 显示', 'LED / 蜂鸣器', '串口上行', 'Web 大屏'].map((item, idx) =&gt; (&#10;          &lt;Box key={idx} style={{ flex: 1, flexDirection: 'column', alignItems: 'center', gap: 8, background: idx === 4 ? '#0E3F8C' : '#E8EFF8', borderRadius: 10, padding: '22px 10px' }}&gt;&#10;            &lt;Text style={{ fontSize: 20, fontWeight: 'bold', color: idx === 4 ? '#FFFFFF' : '#0E3F8C' }}&gt;{item}&lt;/Text&gt;&#10;            &lt;Text style={{ fontSize: 14, color: idx === 4 ? '#C9D9EF' : '#4A5568' }}&gt;{idx === 0 ? '压力传感器' : idx === 1 ? '实时数值/状态' : idx === 2 ? '本地声光预警' : idx === 3 ? 'JSON 数据' : '实时监测'}&lt;/Text&gt;&#10;          &lt;/Box&gt;&#10;        ))}&#10;      &lt;/Box&gt;&#10;      &lt;Box style={{ flexDirection: 'row', gap: 16 }}&gt;&#10;        &lt;Box style={{ flex: 1, background: '#F7F9FC', border: '1px solid #D6DCE5', borderRadius: 10, padding: 18 }}&gt;&#10;          &lt;Text style={{ fontSize: 19, fontWeight: 'bold', color: '#0E3F8C' }}&gt;不依赖上位机&lt;/Text&gt;&#10;          &lt;Text style={{ fontSize: 17, color: '#4A5568', marginTop: 8, lineHeight: 1.6 }}&gt;即使电脑没启动，硬件也能本地声光报警，双重保障。&lt;/Text&gt;&#10;        &lt;/Box&gt;&#10;        &lt;Box style={{ flex: 1, background: '#F7F9FC', border: '1px solid #D6DCE5', borderRadius: 10, padding: 18 }}&gt;&#10;          &lt;Text style={{ fontSize: 19, fontWeight: 'bold', color: '#0E3F8C' }}&gt;MicroPython 固件&lt;/Text&gt;&#10;          &lt;Text style={{ fontSize: 17, color: '#4A5568', marginTop: 8, lineHeight: 1.6 }}&gt;HX711 读取直接实现，不依赖第三方库，代码可控、可答辩。&lt;/Text&gt;&#10;        &lt;/Box&gt;&#10;        &lt;Box style={{ flex: 1, background: '#F7F9FC', border: '1px solid #D6DCE5', borderRadius: 10, padding: 18 }}&gt;&#10;          &lt;Text style={{ fontSize: 19, fontWeight: 'bold', color: '#0E3F8C' }}&gt;诚实标定&lt;/Text&gt;&#10;          &lt;Text style={{ fontSize: 17, color: '#4A5568', marginTop: 8, lineHeight: 1.6 }}&gt;零点 + 比例系数标定，读数随载荷单调稳定，不声称工程精度。&lt;/Text&gt;&#10;        &lt;/Box&gt;&#10;      &lt;/Box&gt;&#10;    &lt;/Box&gt;&#10;    &lt;Box style={{ height: 40, flexDirection: 'row', justifyContent: 'space-between', alignItems: 'center', borderTop: '1px solid #E5E7EB' }}&gt;&#10;      &lt;Text style={{ fontSize: 14, color: '#8B97A8' }}&gt;桥体卫士 · 桥梁结构健康监测缩尺原型&lt;/Text&gt;&#10;      &lt;Text style={{ fontSize: 14, color: '#1E4FA8', fontWeight: 'bold' }}&gt;08 / 10&lt;/Text&gt;&#10;    &lt;/Box&gt;&#10;  &lt;/Box&gt;&#10;&lt;/Slide&gt;&#10;"/>
+        <p:cNvPr id="187" name=""/>
         <p:cNvGrpSpPr/>
         <p:nvPr/>
       </p:nvGrpSpPr>
@@ -9003,7 +9168,10 @@
         </p:spPr>
         <p:txBody>
           <a:bodyPr/>
-          <a:p/>
+          <a:p>
+            <a:pPr/>
+            <a:endParaRPr/>
+          </a:p>
         </p:txBody>
       </p:sp>
       <p:sp>
@@ -9043,7 +9211,10 @@
         </p:spPr>
         <p:txBody>
           <a:bodyPr/>
-          <a:p/>
+          <a:p>
+            <a:pPr/>
+            <a:endParaRPr/>
+          </a:p>
         </p:txBody>
       </p:sp>
       <p:sp>
@@ -9139,7 +9310,10 @@
         </p:spPr>
         <p:txBody>
           <a:bodyPr/>
-          <a:p/>
+          <a:p>
+            <a:pPr/>
+            <a:endParaRPr/>
+          </a:p>
         </p:txBody>
       </p:sp>
       <p:sp>
@@ -9245,7 +9419,10 @@
         </p:spPr>
         <p:txBody>
           <a:bodyPr/>
-          <a:p/>
+          <a:p>
+            <a:pPr/>
+            <a:endParaRPr/>
+          </a:p>
         </p:txBody>
       </p:sp>
       <p:sp>
@@ -9371,7 +9548,10 @@
         </p:spPr>
         <p:txBody>
           <a:bodyPr/>
-          <a:p/>
+          <a:p>
+            <a:pPr/>
+            <a:endParaRPr/>
+          </a:p>
         </p:txBody>
       </p:sp>
       <p:sp>
@@ -9477,7 +9657,10 @@
         </p:spPr>
         <p:txBody>
           <a:bodyPr/>
-          <a:p/>
+          <a:p>
+            <a:pPr/>
+            <a:endParaRPr/>
+          </a:p>
         </p:txBody>
       </p:sp>
       <p:sp>
@@ -9583,7 +9766,10 @@
         </p:spPr>
         <p:txBody>
           <a:bodyPr/>
-          <a:p/>
+          <a:p>
+            <a:pPr/>
+            <a:endParaRPr/>
+          </a:p>
         </p:txBody>
       </p:sp>
       <p:sp>
@@ -9694,7 +9880,10 @@
         </p:spPr>
         <p:txBody>
           <a:bodyPr/>
-          <a:p/>
+          <a:p>
+            <a:pPr/>
+            <a:endParaRPr/>
+          </a:p>
         </p:txBody>
       </p:sp>
       <p:sp>
@@ -9797,7 +9986,10 @@
         </p:spPr>
         <p:txBody>
           <a:bodyPr/>
-          <a:p/>
+          <a:p>
+            <a:pPr/>
+            <a:endParaRPr/>
+          </a:p>
         </p:txBody>
       </p:sp>
       <p:sp>
@@ -9920,7 +10112,10 @@
         </p:spPr>
         <p:txBody>
           <a:bodyPr/>
-          <a:p/>
+          <a:p>
+            <a:pPr/>
+            <a:endParaRPr/>
+          </a:p>
         </p:txBody>
       </p:sp>
       <p:sp>
@@ -10052,7 +10247,10 @@
         </p:spPr>
         <p:txBody>
           <a:bodyPr/>
-          <a:p/>
+          <a:p>
+            <a:pPr/>
+            <a:endParaRPr/>
+          </a:p>
         </p:txBody>
       </p:sp>
       <p:sp>
@@ -10155,7 +10353,7 @@
   <p:cSld>
     <p:spTree>
       <p:nvGrpSpPr>
-        <p:cNvPr id="219" name="" descr="&lt;Slide style={{ background: '#FFFFFF', width: '1280px', height: '720px', padding: '0 40px' }}&gt;&#10;  &lt;Box style={{ flexDirection: 'column', width: '100%', height: '100%' }}&gt;&#10;    &lt;Box style={{ height: 88, flexDirection: 'row', alignItems: 'center', justifyContent: 'space-between', borderBottom: '2px solid #1E4FA8' }}&gt;&#10;      &lt;Text style={{ fontSize: 32, fontWeight: 'bold', color: '#0E3F8C' }}&gt;演示闭环 + 测试证据&lt;/Text&gt;&#10;      &lt;Text style={{ fontSize: 14, color: '#8B97A8' }}&gt;桥体卫士&lt;/Text&gt;&#10;    &lt;/Box&gt;&#10;    &lt;Box style={{ flex: 1, flexDirection: 'row', gap: 24, padding: '18px 0' }}&gt;&#10;      &lt;Box style={{ width: '56%', flexDirection: 'column', justifyContent: 'center', gap: 10 }}&gt;&#10;        {['① 施加载荷，应变值上升', '② 超过阈值，风险等级变色', '③ 硬件蜂鸣器响、红灯亮', '④ Web 弹出可解释报警', '⑤ 点击「确认处理」闭环', '⑥ 历史时间线 + 统计 + 导出', '⑦ 拔线，如实显示「设备离线」'].map((item, idx) =&gt; (&#10;          &lt;Box key={idx} style={{ flexDirection: 'row', alignItems: 'center', gap: 14, background: idx === 3 ? '#E8EFF8' : '#F7F9FC', border: '1px solid #D6DCE5', borderRadius: 8, padding: '9px 14px' }}&gt;&#10;            &lt;Text style={{ fontSize: 18, color: '#1E4FA8', fontWeight: 'bold' }}&gt;{item.split(' ')[0]}&lt;/Text&gt;&#10;            &lt;Text style={{ fontSize: 17, color: '#4A5568', flex: 1 }}&gt;{item.slice(item.indexOf(' '))}&lt;/Text&gt;&#10;          &lt;/Box&gt;&#10;        ))}&#10;      &lt;/Box&gt;&#10;      &lt;Box style={{ flex: 1, flexDirection: 'column', justifyContent: 'center', gap: 14 }}&gt;&#10;        &lt;Box style={{ background: '#E8EFF8', borderRadius: 10, padding: 20 }}&gt;&#10;          &lt;Text style={{ fontSize: 22, fontWeight: 'bold', color: '#0E3F8C' }}&gt;自动化测试 28 项全绿&lt;/Text&gt;&#10;          &lt;Text style={{ fontSize: 17, color: '#4A5568', marginTop: 10, lineHeight: 1.6 }}&gt;规则引擎（含防刷屏、等级分级）· 数据层 · 鉴权 · API 端到端 · 设备心跳 · 串口链路&lt;/Text&gt;&#10;        &lt;/Box&gt;&#10;        &lt;Box style={{ background: '#F7F9FC', border: '1px solid #D6DCE5', borderRadius: 10, padding: 20 }}&gt;&#10;          &lt;Text style={{ fontSize: 22, fontWeight: 'bold', color: '#0E3F8C' }}&gt;冒烟测试&lt;/Text&gt;&#10;          &lt;Text style={{ fontSize: 17, color: '#4A5568', marginTop: 10, lineHeight: 1.6 }}&gt;登录 302 · 大屏 200 · 未登录 API 401 · 数据快照含设备健康度&lt;/Text&gt;&#10;        &lt;/Box&gt;&#10;      &lt;/Box&gt;&#10;    &lt;/Box&gt;&#10;    &lt;Box style={{ height: 40, flexDirection: 'row', justifyContent: 'space-between', alignItems: 'center', borderTop: '1px solid #E5E7EB' }}&gt;&#10;      &lt;Text style={{ fontSize: 14, color: '#8B97A8' }}&gt;桥体卫士 · 桥梁结构健康监测缩尺原型&lt;/Text&gt;&#10;      &lt;Text style={{ fontSize: 14, color: '#1E4FA8', fontWeight: 'bold' }}&gt;09 / 10&lt;/Text&gt;&#10;    &lt;/Box&gt;&#10;  &lt;/Box&gt;&#10;&lt;/Slide&gt;&#10;"/>
+        <p:cNvPr id="219" name=""/>
         <p:cNvGrpSpPr/>
         <p:nvPr/>
       </p:nvGrpSpPr>
@@ -10188,7 +10386,10 @@
         </p:spPr>
         <p:txBody>
           <a:bodyPr/>
-          <a:p/>
+          <a:p>
+            <a:pPr/>
+            <a:endParaRPr/>
+          </a:p>
         </p:txBody>
       </p:sp>
       <p:sp>
@@ -10228,7 +10429,10 @@
         </p:spPr>
         <p:txBody>
           <a:bodyPr/>
-          <a:p/>
+          <a:p>
+            <a:pPr/>
+            <a:endParaRPr/>
+          </a:p>
         </p:txBody>
       </p:sp>
       <p:sp>
@@ -10349,7 +10553,10 @@
         </p:spPr>
         <p:txBody>
           <a:bodyPr/>
-          <a:p/>
+          <a:p>
+            <a:pPr/>
+            <a:endParaRPr/>
+          </a:p>
         </p:txBody>
       </p:sp>
       <p:sp>
@@ -10460,7 +10667,10 @@
         </p:spPr>
         <p:txBody>
           <a:bodyPr/>
-          <a:p/>
+          <a:p>
+            <a:pPr/>
+            <a:endParaRPr/>
+          </a:p>
         </p:txBody>
       </p:sp>
       <p:sp>
@@ -10571,7 +10781,10 @@
         </p:spPr>
         <p:txBody>
           <a:bodyPr/>
-          <a:p/>
+          <a:p>
+            <a:pPr/>
+            <a:endParaRPr/>
+          </a:p>
         </p:txBody>
       </p:sp>
       <p:sp>
@@ -10682,7 +10895,10 @@
         </p:spPr>
         <p:txBody>
           <a:bodyPr/>
-          <a:p/>
+          <a:p>
+            <a:pPr/>
+            <a:endParaRPr/>
+          </a:p>
         </p:txBody>
       </p:sp>
       <p:sp>
@@ -10793,7 +11009,10 @@
         </p:spPr>
         <p:txBody>
           <a:bodyPr/>
-          <a:p/>
+          <a:p>
+            <a:pPr/>
+            <a:endParaRPr/>
+          </a:p>
         </p:txBody>
       </p:sp>
       <p:sp>
@@ -10904,7 +11123,10 @@
         </p:spPr>
         <p:txBody>
           <a:bodyPr/>
-          <a:p/>
+          <a:p>
+            <a:pPr/>
+            <a:endParaRPr/>
+          </a:p>
         </p:txBody>
       </p:sp>
       <p:sp>
@@ -11055,7 +11277,10 @@
         </p:spPr>
         <p:txBody>
           <a:bodyPr/>
-          <a:p/>
+          <a:p>
+            <a:pPr/>
+            <a:endParaRPr/>
+          </a:p>
         </p:txBody>
       </p:sp>
       <p:sp>
@@ -11161,7 +11386,10 @@
         </p:spPr>
         <p:txBody>
           <a:bodyPr/>
-          <a:p/>
+          <a:p>
+            <a:pPr/>
+            <a:endParaRPr/>
+          </a:p>
         </p:txBody>
       </p:sp>
       <p:sp>
@@ -11384,7 +11612,10 @@
         </p:spPr>
         <p:txBody>
           <a:bodyPr/>
-          <a:p/>
+          <a:p>
+            <a:pPr/>
+            <a:endParaRPr/>
+          </a:p>
         </p:txBody>
       </p:sp>
       <p:sp>
@@ -11556,7 +11787,10 @@
         </p:spPr>
         <p:txBody>
           <a:bodyPr/>
-          <a:p/>
+          <a:p>
+            <a:pPr/>
+            <a:endParaRPr/>
+          </a:p>
         </p:txBody>
       </p:sp>
       <p:sp>

--- a/桥体卫士答辩PPT/桥体卫士答辩PPT.pptx
+++ b/桥体卫士答辩PPT/桥体卫士答辩PPT.pptx
@@ -6656,56 +6656,22 @@
               </a:lnSpc>
             </a:pPr>
             <a:r>
-              <a:rPr lang="zh-CN" sz="1125" b="1">
+              <a:rPr lang="zh-CN" sz="1500" b="1">
                 <a:solidFill>
                   <a:srgbClr val="0E3F8C"/>
                 </a:solidFill>
                 <a:latin typeface="Microsoft YaHei"/>
                 <a:ea typeface="Microsoft YaHei"/>
               </a:rPr>
-              <a:t>示例：「应变值</a:t>
-            </a:r>
-            <a:r>
-              <a:rPr lang="en-US" sz="1125" b="1">
-                <a:solidFill>
-                  <a:srgbClr val="0E3F8C"/>
-                </a:solidFill>
-                <a:latin typeface="Microsoft YaHei"/>
-                <a:ea typeface="Microsoft YaHei"/>
-              </a:rPr>
-              <a:t xml:space="preserve"> 135.00 με </a:t>
-            </a:r>
-            <a:r>
-              <a:rPr lang="zh-CN" sz="1125" b="1">
-                <a:solidFill>
-                  <a:srgbClr val="0E3F8C"/>
-                </a:solidFill>
-                <a:latin typeface="Microsoft YaHei"/>
-                <a:ea typeface="Microsoft YaHei"/>
-              </a:rPr>
-              <a:t>超过阈值</a:t>
-            </a:r>
-            <a:r>
-              <a:rPr lang="en-US" sz="1125" b="1">
-                <a:solidFill>
-                  <a:srgbClr val="0E3F8C"/>
-                </a:solidFill>
-                <a:latin typeface="Microsoft YaHei"/>
-                <a:ea typeface="Microsoft YaHei"/>
-              </a:rPr>
-              <a:t xml:space="preserve"> 120.00 με</a:t>
-            </a:r>
-            <a:r>
-              <a:rPr lang="zh-CN" sz="1125" b="1">
-                <a:solidFill>
-                  <a:srgbClr val="0E3F8C"/>
-                </a:solidFill>
-                <a:latin typeface="Microsoft YaHei"/>
-                <a:ea typeface="Microsoft YaHei"/>
-              </a:rPr>
-              <a:t>」</a:t>
-            </a:r>
-            <a:endParaRPr/>
+              <a:t>示例：「相对应变指标 135 超过阈值 120」</a:t>
+            </a:r>
+            <a:endParaRPr lang="zh-CN" sz="1500" b="1">
+              <a:solidFill>
+                <a:srgbClr val="0E3F8C"/>
+              </a:solidFill>
+              <a:latin typeface="Microsoft YaHei"/>
+              <a:ea typeface="Microsoft YaHei"/>
+            </a:endParaRPr>
           </a:p>
         </p:txBody>
       </p:sp>

--- a/桥体卫士答辩PPT/桥体卫士答辩PPT.pptx
+++ b/桥体卫士答辩PPT/桥体卫士答辩PPT.pptx
@@ -2029,7 +2029,7 @@
                 <a:latin typeface="Microsoft YaHei"/>
                 <a:ea typeface="Microsoft YaHei"/>
               </a:rPr>
-              <a:t xml:space="preserve">28 </a:t>
+              <a:t xml:space="preserve">101 </a:t>
             </a:r>
             <a:r>
               <a:rPr lang="zh-CN" sz="1425">
@@ -8696,7 +8696,7 @@
                 <a:latin typeface="Microsoft YaHei"/>
                 <a:ea typeface="Microsoft YaHei"/>
               </a:rPr>
-              <a:t>28</a:t>
+              <a:t>101</a:t>
             </a:r>
             <a:endParaRPr/>
           </a:p>
